--- a/dist/weeks/서비스디자인_04주차_리서치합성.pptx
+++ b/dist/weeks/서비스디자인_04주차_리서치합성.pptx
@@ -10054,7 +10054,7 @@
         <p:spPr>
           <a:xfrm>
             <a:off x="640080" y="1719072"/>
-            <a:ext cx="1600200" cy="566928"/>
+            <a:ext cx="1600200" cy="593054"/>
           </a:xfrm>
           <a:prstGeom prst="rect">
             <a:avLst/>
@@ -10093,7 +10093,7 @@
         <p:spPr>
           <a:xfrm>
             <a:off x="2377440" y="1719072"/>
-            <a:ext cx="6888175" cy="566928"/>
+            <a:ext cx="6888175" cy="593054"/>
           </a:xfrm>
           <a:prstGeom prst="rect">
             <a:avLst/>
@@ -10132,7 +10132,7 @@
         <p:spPr>
           <a:xfrm>
             <a:off x="9265615" y="1719072"/>
-            <a:ext cx="2286000" cy="566928"/>
+            <a:ext cx="2286000" cy="593054"/>
           </a:xfrm>
           <a:prstGeom prst="rect">
             <a:avLst/>
@@ -10170,7 +10170,7 @@
         </p:nvSpPr>
         <p:spPr>
           <a:xfrm>
-            <a:off x="640080" y="2267712"/>
+            <a:off x="640080" y="2293838"/>
             <a:ext cx="10911535" cy="9144"/>
           </a:xfrm>
           <a:prstGeom prst="rect">
@@ -10195,8 +10195,8 @@
         </p:nvSpPr>
         <p:spPr>
           <a:xfrm>
-            <a:off x="640080" y="2286000"/>
-            <a:ext cx="1600200" cy="566928"/>
+            <a:off x="640080" y="2312126"/>
+            <a:ext cx="1600200" cy="593054"/>
           </a:xfrm>
           <a:prstGeom prst="rect">
             <a:avLst/>
@@ -10234,8 +10234,8 @@
         </p:nvSpPr>
         <p:spPr>
           <a:xfrm>
-            <a:off x="2377440" y="2286000"/>
-            <a:ext cx="6888175" cy="566928"/>
+            <a:off x="2377440" y="2312126"/>
+            <a:ext cx="6888175" cy="593054"/>
           </a:xfrm>
           <a:prstGeom prst="rect">
             <a:avLst/>
@@ -10273,8 +10273,8 @@
         </p:nvSpPr>
         <p:spPr>
           <a:xfrm>
-            <a:off x="9265615" y="2286000"/>
-            <a:ext cx="2286000" cy="566928"/>
+            <a:off x="9265615" y="2312126"/>
+            <a:ext cx="2286000" cy="593054"/>
           </a:xfrm>
           <a:prstGeom prst="rect">
             <a:avLst/>
@@ -10312,7 +10312,7 @@
         </p:nvSpPr>
         <p:spPr>
           <a:xfrm>
-            <a:off x="640080" y="2834640"/>
+            <a:off x="640080" y="2886891"/>
             <a:ext cx="10911535" cy="9144"/>
           </a:xfrm>
           <a:prstGeom prst="rect">
@@ -10337,8 +10337,8 @@
         </p:nvSpPr>
         <p:spPr>
           <a:xfrm>
-            <a:off x="640080" y="2852928"/>
-            <a:ext cx="1600200" cy="566928"/>
+            <a:off x="640080" y="2905179"/>
+            <a:ext cx="1600200" cy="593054"/>
           </a:xfrm>
           <a:prstGeom prst="rect">
             <a:avLst/>
@@ -10376,8 +10376,8 @@
         </p:nvSpPr>
         <p:spPr>
           <a:xfrm>
-            <a:off x="2377440" y="2852928"/>
-            <a:ext cx="6888175" cy="566928"/>
+            <a:off x="2377440" y="2905179"/>
+            <a:ext cx="6888175" cy="593054"/>
           </a:xfrm>
           <a:prstGeom prst="rect">
             <a:avLst/>
@@ -10415,8 +10415,8 @@
         </p:nvSpPr>
         <p:spPr>
           <a:xfrm>
-            <a:off x="9265615" y="2852928"/>
-            <a:ext cx="2286000" cy="566928"/>
+            <a:off x="9265615" y="2905179"/>
+            <a:ext cx="2286000" cy="593054"/>
           </a:xfrm>
           <a:prstGeom prst="rect">
             <a:avLst/>
@@ -10454,7 +10454,7 @@
         </p:nvSpPr>
         <p:spPr>
           <a:xfrm>
-            <a:off x="640080" y="3401568"/>
+            <a:off x="640080" y="3479945"/>
             <a:ext cx="10911535" cy="9144"/>
           </a:xfrm>
           <a:prstGeom prst="rect">
@@ -10479,8 +10479,8 @@
         </p:nvSpPr>
         <p:spPr>
           <a:xfrm>
-            <a:off x="640080" y="3419856"/>
-            <a:ext cx="1600200" cy="566928"/>
+            <a:off x="640080" y="3498233"/>
+            <a:ext cx="1600200" cy="593054"/>
           </a:xfrm>
           <a:prstGeom prst="rect">
             <a:avLst/>
@@ -10518,8 +10518,8 @@
         </p:nvSpPr>
         <p:spPr>
           <a:xfrm>
-            <a:off x="2377440" y="3419856"/>
-            <a:ext cx="6888175" cy="566928"/>
+            <a:off x="2377440" y="3498233"/>
+            <a:ext cx="6888175" cy="593054"/>
           </a:xfrm>
           <a:prstGeom prst="rect">
             <a:avLst/>
@@ -10557,7 +10557,7 @@
         </p:nvSpPr>
         <p:spPr>
           <a:xfrm>
-            <a:off x="640080" y="3968496"/>
+            <a:off x="640080" y="4072999"/>
             <a:ext cx="10911535" cy="9144"/>
           </a:xfrm>
           <a:prstGeom prst="rect">
@@ -10582,8 +10582,8 @@
         </p:nvSpPr>
         <p:spPr>
           <a:xfrm>
-            <a:off x="640080" y="3986784"/>
-            <a:ext cx="1600200" cy="566928"/>
+            <a:off x="640080" y="4091287"/>
+            <a:ext cx="1600200" cy="593054"/>
           </a:xfrm>
           <a:prstGeom prst="rect">
             <a:avLst/>
@@ -10621,8 +10621,8 @@
         </p:nvSpPr>
         <p:spPr>
           <a:xfrm>
-            <a:off x="2377440" y="3986784"/>
-            <a:ext cx="6888175" cy="566928"/>
+            <a:off x="2377440" y="4091287"/>
+            <a:ext cx="6888175" cy="593054"/>
           </a:xfrm>
           <a:prstGeom prst="rect">
             <a:avLst/>
@@ -10660,8 +10660,8 @@
         </p:nvSpPr>
         <p:spPr>
           <a:xfrm>
-            <a:off x="9265615" y="3986784"/>
-            <a:ext cx="2286000" cy="566928"/>
+            <a:off x="9265615" y="4091287"/>
+            <a:ext cx="2286000" cy="593054"/>
           </a:xfrm>
           <a:prstGeom prst="rect">
             <a:avLst/>
@@ -10699,7 +10699,7 @@
         </p:nvSpPr>
         <p:spPr>
           <a:xfrm>
-            <a:off x="640080" y="4535424"/>
+            <a:off x="640080" y="4666053"/>
             <a:ext cx="10911535" cy="9144"/>
           </a:xfrm>
           <a:prstGeom prst="rect">
@@ -10724,8 +10724,8 @@
         </p:nvSpPr>
         <p:spPr>
           <a:xfrm>
-            <a:off x="640080" y="4553712"/>
-            <a:ext cx="1600200" cy="566928"/>
+            <a:off x="640080" y="4684341"/>
+            <a:ext cx="1600200" cy="593054"/>
           </a:xfrm>
           <a:prstGeom prst="rect">
             <a:avLst/>
@@ -10763,8 +10763,8 @@
         </p:nvSpPr>
         <p:spPr>
           <a:xfrm>
-            <a:off x="2377440" y="4553712"/>
-            <a:ext cx="6888175" cy="566928"/>
+            <a:off x="2377440" y="4684341"/>
+            <a:ext cx="6888175" cy="593054"/>
           </a:xfrm>
           <a:prstGeom prst="rect">
             <a:avLst/>
@@ -10802,8 +10802,8 @@
         </p:nvSpPr>
         <p:spPr>
           <a:xfrm>
-            <a:off x="9265615" y="4553712"/>
-            <a:ext cx="2286000" cy="566928"/>
+            <a:off x="9265615" y="4684341"/>
+            <a:ext cx="2286000" cy="593054"/>
           </a:xfrm>
           <a:prstGeom prst="rect">
             <a:avLst/>
@@ -10841,7 +10841,7 @@
         </p:nvSpPr>
         <p:spPr>
           <a:xfrm>
-            <a:off x="640080" y="5102352"/>
+            <a:off x="640080" y="5259106"/>
             <a:ext cx="10911535" cy="9144"/>
           </a:xfrm>
           <a:prstGeom prst="rect">
@@ -10866,8 +10866,8 @@
         </p:nvSpPr>
         <p:spPr>
           <a:xfrm>
-            <a:off x="640080" y="5120640"/>
-            <a:ext cx="1600200" cy="566928"/>
+            <a:off x="640080" y="5277394"/>
+            <a:ext cx="1600200" cy="593054"/>
           </a:xfrm>
           <a:prstGeom prst="rect">
             <a:avLst/>
@@ -10905,8 +10905,8 @@
         </p:nvSpPr>
         <p:spPr>
           <a:xfrm>
-            <a:off x="2377440" y="5120640"/>
-            <a:ext cx="6888175" cy="566928"/>
+            <a:off x="2377440" y="5277394"/>
+            <a:ext cx="6888175" cy="593054"/>
           </a:xfrm>
           <a:prstGeom prst="rect">
             <a:avLst/>
@@ -10944,8 +10944,8 @@
         </p:nvSpPr>
         <p:spPr>
           <a:xfrm>
-            <a:off x="9265615" y="5120640"/>
-            <a:ext cx="2286000" cy="566928"/>
+            <a:off x="9265615" y="5277394"/>
+            <a:ext cx="2286000" cy="593054"/>
           </a:xfrm>
           <a:prstGeom prst="rect">
             <a:avLst/>

--- a/dist/weeks/서비스디자인_04주차_리서치합성.pptx
+++ b/dist/weeks/서비스디자인_04주차_리서치합성.pptx
@@ -8898,7 +8898,7 @@
         <p:spPr>
           <a:xfrm>
             <a:off x="1353312" y="1755648"/>
-            <a:ext cx="4248760" cy="585216"/>
+            <a:ext cx="4267048" cy="585216"/>
           </a:xfrm>
           <a:prstGeom prst="rect">
             <a:avLst/>
@@ -9026,7 +9026,7 @@
         <p:spPr>
           <a:xfrm>
             <a:off x="1353312" y="2487168"/>
-            <a:ext cx="4248760" cy="585216"/>
+            <a:ext cx="4267048" cy="585216"/>
           </a:xfrm>
           <a:prstGeom prst="rect">
             <a:avLst/>
@@ -9154,7 +9154,7 @@
         <p:spPr>
           <a:xfrm>
             <a:off x="1353312" y="3218688"/>
-            <a:ext cx="4248760" cy="585216"/>
+            <a:ext cx="4267048" cy="585216"/>
           </a:xfrm>
           <a:prstGeom prst="rect">
             <a:avLst/>
@@ -9282,7 +9282,7 @@
         <p:spPr>
           <a:xfrm>
             <a:off x="1353312" y="3950208"/>
-            <a:ext cx="4248760" cy="585216"/>
+            <a:ext cx="4267048" cy="585216"/>
           </a:xfrm>
           <a:prstGeom prst="rect">
             <a:avLst/>
@@ -9410,7 +9410,7 @@
         <p:spPr>
           <a:xfrm>
             <a:off x="7010248" y="1755648"/>
-            <a:ext cx="4248760" cy="585216"/>
+            <a:ext cx="4267048" cy="585216"/>
           </a:xfrm>
           <a:prstGeom prst="rect">
             <a:avLst/>
@@ -9538,7 +9538,7 @@
         <p:spPr>
           <a:xfrm>
             <a:off x="7010248" y="2487168"/>
-            <a:ext cx="4248760" cy="585216"/>
+            <a:ext cx="4267048" cy="585216"/>
           </a:xfrm>
           <a:prstGeom prst="rect">
             <a:avLst/>
@@ -9666,7 +9666,7 @@
         <p:spPr>
           <a:xfrm>
             <a:off x="7010248" y="3218688"/>
-            <a:ext cx="4248760" cy="585216"/>
+            <a:ext cx="4267048" cy="585216"/>
           </a:xfrm>
           <a:prstGeom prst="rect">
             <a:avLst/>
@@ -9794,7 +9794,7 @@
         <p:spPr>
           <a:xfrm>
             <a:off x="7010248" y="3950208"/>
-            <a:ext cx="4248760" cy="585216"/>
+            <a:ext cx="4267048" cy="585216"/>
           </a:xfrm>
           <a:prstGeom prst="rect">
             <a:avLst/>
@@ -9832,7 +9832,7 @@
         </p:nvSpPr>
         <p:spPr>
           <a:xfrm>
-            <a:off x="640080" y="5468112"/>
+            <a:off x="640080" y="4736592"/>
             <a:ext cx="10911535" cy="7315"/>
           </a:xfrm>
           <a:prstGeom prst="rect">
@@ -9857,7 +9857,7 @@
         </p:nvSpPr>
         <p:spPr>
           <a:xfrm>
-            <a:off x="640080" y="5577840"/>
+            <a:off x="640080" y="4846320"/>
             <a:ext cx="10911535" cy="402336"/>
           </a:xfrm>
           <a:prstGeom prst="rect">
